--- a/demo/presentation/QMakers_PSK_Deck.pptx
+++ b/demo/presentation/QMakers_PSK_Deck.pptx
@@ -6309,7 +6309,7 @@
         <p:spPr>
           <a:xfrm>
             <a:off x="713232" y="4572000"/>
-            <a:ext cx="3794760" cy="1097280"/>
+            <a:ext cx="3794760" cy="1325880"/>
           </a:xfrm>
           <a:prstGeom prst="rect">
             <a:avLst/>
@@ -6394,7 +6394,7 @@
         <p:spPr>
           <a:xfrm>
             <a:off x="932688" y="5358384"/>
-            <a:ext cx="3355848" cy="274320"/>
+            <a:ext cx="3355848" cy="502920"/>
           </a:xfrm>
           <a:prstGeom prst="rect">
             <a:avLst/>
@@ -6663,7 +6663,7 @@
                 <a:latin typeface="Segoe UI"/>
               </a:rPr>
               <a:t>Two rows become six, built from that player's own history by the trained ranker.
-Nothing was removed. Popularno is still there, unchanged — and that turns out to matter.</a:t>
+Nothing was removed. Popular is still there, unchanged — and that turns out to matter.</a:t>
             </a:r>
           </a:p>
         </p:txBody>
@@ -8850,7 +8850,7 @@
                 </a:solidFill>
                 <a:latin typeface="Segoe UI"/>
               </a:rPr>
-              <a:t>Replacing it would have made the lobby worse — which is why Popularno is still on the screen you just saw.</a:t>
+              <a:t>Replacing it would have made the lobby worse — which is why Popular is still on the screen you just saw.</a:t>
             </a:r>
           </a:p>
         </p:txBody>
